--- a/generated/Tier 1 Broker Scorecards/Tamarez Group Inc_Broker_Scorecard.pptx
+++ b/generated/Tier 1 Broker Scorecards/Tamarez Group Inc_Broker_Scorecard.pptx
@@ -3394,7 +3394,7 @@
                         <a:rPr sz="900">
                           <a:latin typeface="Segoe UI"/>
                         </a:rPr>
-                        <a:t>Tier 1  |  5.78% / 15.00%</a:t>
+                        <a:t>Tier 1  |  6.21% / 15.00%</a:t>
                       </a:r>
                     </a:p>
                   </a:txBody>
@@ -3766,7 +3766,7 @@
                         <a:rPr sz="900">
                           <a:latin typeface="Segoe UI"/>
                         </a:rPr>
-                        <a:t>Non-Fleet Subs: 172  |  Binds: 10</a:t>
+                        <a:t>Non-Fleet Subs: 176  |  Binds: 11</a:t>
                       </a:r>
                     </a:p>
                   </a:txBody>
@@ -4428,7 +4428,7 @@
                           </a:solidFill>
                           <a:latin typeface="Segoe UI"/>
                         </a:rPr>
-                        <a:t>30</a:t>
+                        <a:t>34</a:t>
                       </a:r>
                     </a:p>
                   </a:txBody>
@@ -4703,11 +4703,11 @@
                       <a:r>
                         <a:rPr sz="800">
                           <a:solidFill>
-                            <a:srgbClr val="059669"/>
+                            <a:srgbClr val="DC2626"/>
                           </a:solidFill>
                           <a:latin typeface="Segoe UI"/>
                         </a:rPr>
-                        <a:t>6.7%</a:t>
+                        <a:t>5.9%</a:t>
                       </a:r>
                     </a:p>
                   </a:txBody>

--- a/generated/Tier 1 Broker Scorecards/Tamarez Group Inc_Broker_Scorecard.pptx
+++ b/generated/Tier 1 Broker Scorecards/Tamarez Group Inc_Broker_Scorecard.pptx
@@ -3394,7 +3394,7 @@
                         <a:rPr sz="900">
                           <a:latin typeface="Segoe UI"/>
                         </a:rPr>
-                        <a:t>Tier 1  |  6.21% / 15.00%</a:t>
+                        <a:t>Tier 1  |  5.52% / 15.00%</a:t>
                       </a:r>
                     </a:p>
                   </a:txBody>
@@ -3766,7 +3766,7 @@
                         <a:rPr sz="900">
                           <a:latin typeface="Segoe UI"/>
                         </a:rPr>
-                        <a:t>Non-Fleet Subs: 176  |  Binds: 11</a:t>
+                        <a:t>Non-Fleet Subs: 180  |  Binds: 10</a:t>
                       </a:r>
                     </a:p>
                   </a:txBody>
@@ -4428,7 +4428,7 @@
                           </a:solidFill>
                           <a:latin typeface="Segoe UI"/>
                         </a:rPr>
-                        <a:t>34</a:t>
+                        <a:t>39</a:t>
                       </a:r>
                     </a:p>
                   </a:txBody>
@@ -4707,7 +4707,7 @@
                           </a:solidFill>
                           <a:latin typeface="Segoe UI"/>
                         </a:rPr>
-                        <a:t>5.9%</a:t>
+                        <a:t>5.1%</a:t>
                       </a:r>
                     </a:p>
                   </a:txBody>

--- a/generated/Tier 1 Broker Scorecards/Tamarez Group Inc_Broker_Scorecard.pptx
+++ b/generated/Tier 1 Broker Scorecards/Tamarez Group Inc_Broker_Scorecard.pptx
@@ -3394,7 +3394,7 @@
                         <a:rPr sz="900">
                           <a:latin typeface="Segoe UI"/>
                         </a:rPr>
-                        <a:t>Tier 1  |  5.52% / 15.00%</a:t>
+                        <a:t>Tier 1  |  5.46% / 15.00%</a:t>
                       </a:r>
                     </a:p>
                   </a:txBody>
@@ -3766,7 +3766,7 @@
                         <a:rPr sz="900">
                           <a:latin typeface="Segoe UI"/>
                         </a:rPr>
-                        <a:t>Non-Fleet Subs: 180  |  Binds: 10</a:t>
+                        <a:t>Non-Fleet Subs: 182  |  Binds: 10</a:t>
                       </a:r>
                     </a:p>
                   </a:txBody>
@@ -4428,7 +4428,7 @@
                           </a:solidFill>
                           <a:latin typeface="Segoe UI"/>
                         </a:rPr>
-                        <a:t>39</a:t>
+                        <a:t>41</a:t>
                       </a:r>
                     </a:p>
                   </a:txBody>
@@ -4707,7 +4707,7 @@
                           </a:solidFill>
                           <a:latin typeface="Segoe UI"/>
                         </a:rPr>
-                        <a:t>5.1%</a:t>
+                        <a:t>4.9%</a:t>
                       </a:r>
                     </a:p>
                   </a:txBody>

--- a/generated/Tier 1 Broker Scorecards/Tamarez Group Inc_Broker_Scorecard.pptx
+++ b/generated/Tier 1 Broker Scorecards/Tamarez Group Inc_Broker_Scorecard.pptx
@@ -3394,7 +3394,7 @@
                         <a:rPr sz="900">
                           <a:latin typeface="Segoe UI"/>
                         </a:rPr>
-                        <a:t>Tier 1  |  5.46% / 15.00%</a:t>
+                        <a:t>Tier 1  |  5.43% / 15.00%</a:t>
                       </a:r>
                     </a:p>
                   </a:txBody>
@@ -3766,7 +3766,7 @@
                         <a:rPr sz="900">
                           <a:latin typeface="Segoe UI"/>
                         </a:rPr>
-                        <a:t>Non-Fleet Subs: 182  |  Binds: 10</a:t>
+                        <a:t>Non-Fleet Subs: 183  |  Binds: 10</a:t>
                       </a:r>
                     </a:p>
                   </a:txBody>
@@ -4428,7 +4428,7 @@
                           </a:solidFill>
                           <a:latin typeface="Segoe UI"/>
                         </a:rPr>
-                        <a:t>41</a:t>
+                        <a:t>42</a:t>
                       </a:r>
                     </a:p>
                   </a:txBody>
@@ -4707,7 +4707,7 @@
                           </a:solidFill>
                           <a:latin typeface="Segoe UI"/>
                         </a:rPr>
-                        <a:t>4.9%</a:t>
+                        <a:t>4.8%</a:t>
                       </a:r>
                     </a:p>
                   </a:txBody>

--- a/generated/Tier 1 Broker Scorecards/Tamarez Group Inc_Broker_Scorecard.pptx
+++ b/generated/Tier 1 Broker Scorecards/Tamarez Group Inc_Broker_Scorecard.pptx
@@ -3394,7 +3394,7 @@
                         <a:rPr sz="900">
                           <a:latin typeface="Segoe UI"/>
                         </a:rPr>
-                        <a:t>Tier 1  |  5.43% / 15.00%</a:t>
+                        <a:t>Tier 1  |  5.35% / 15.00%</a:t>
                       </a:r>
                     </a:p>
                   </a:txBody>
@@ -3766,7 +3766,7 @@
                         <a:rPr sz="900">
                           <a:latin typeface="Segoe UI"/>
                         </a:rPr>
-                        <a:t>Non-Fleet Subs: 183  |  Binds: 10</a:t>
+                        <a:t>Non-Fleet Subs: 186  |  Binds: 10</a:t>
                       </a:r>
                     </a:p>
                   </a:txBody>
@@ -4428,7 +4428,7 @@
                           </a:solidFill>
                           <a:latin typeface="Segoe UI"/>
                         </a:rPr>
-                        <a:t>42</a:t>
+                        <a:t>45</a:t>
                       </a:r>
                     </a:p>
                   </a:txBody>
@@ -4707,7 +4707,7 @@
                           </a:solidFill>
                           <a:latin typeface="Segoe UI"/>
                         </a:rPr>
-                        <a:t>4.8%</a:t>
+                        <a:t>4.4%</a:t>
                       </a:r>
                     </a:p>
                   </a:txBody>

--- a/generated/Tier 1 Broker Scorecards/Tamarez Group Inc_Broker_Scorecard.pptx
+++ b/generated/Tier 1 Broker Scorecards/Tamarez Group Inc_Broker_Scorecard.pptx
@@ -3357,7 +3357,7 @@
                         <a:rPr sz="800">
                           <a:latin typeface="Segoe UI"/>
                         </a:rPr>
-                        <a:t>$861,891.23 / $946,706.66 / $166,068.76</a:t>
+                        <a:t>$861,891.23 / $946,627.22 / $165,989.32</a:t>
                       </a:r>
                     </a:p>
                   </a:txBody>
@@ -3394,7 +3394,7 @@
                         <a:rPr sz="900">
                           <a:latin typeface="Segoe UI"/>
                         </a:rPr>
-                        <a:t>Tier 1  |  5.35% / 15.00%</a:t>
+                        <a:t>Tier 1  |  5.26% / 15.00%</a:t>
                       </a:r>
                     </a:p>
                   </a:txBody>
@@ -3766,7 +3766,7 @@
                         <a:rPr sz="900">
                           <a:latin typeface="Segoe UI"/>
                         </a:rPr>
-                        <a:t>Non-Fleet Subs: 186  |  Binds: 10</a:t>
+                        <a:t>Non-Fleet Subs: 189  |  Binds: 10</a:t>
                       </a:r>
                     </a:p>
                   </a:txBody>
@@ -3803,7 +3803,7 @@
                         <a:rPr sz="900">
                           <a:latin typeface="Segoe UI"/>
                         </a:rPr>
-                        <a:t>Non-Fleet Bound Premium: $166,068.76</a:t>
+                        <a:t>Non-Fleet Bound Premium: $165,989.32</a:t>
                       </a:r>
                     </a:p>
                   </a:txBody>
@@ -4428,7 +4428,7 @@
                           </a:solidFill>
                           <a:latin typeface="Segoe UI"/>
                         </a:rPr>
-                        <a:t>45</a:t>
+                        <a:t>49</a:t>
                       </a:r>
                     </a:p>
                   </a:txBody>
@@ -4707,7 +4707,7 @@
                           </a:solidFill>
                           <a:latin typeface="Segoe UI"/>
                         </a:rPr>
-                        <a:t>4.4%</a:t>
+                        <a:t>6.1%</a:t>
                       </a:r>
                     </a:p>
                   </a:txBody>
@@ -4983,7 +4983,7 @@
                           </a:solidFill>
                           <a:latin typeface="Segoe UI"/>
                         </a:rPr>
-                        <a:t>2</a:t>
+                        <a:t>3</a:t>
                       </a:r>
                     </a:p>
                   </a:txBody>

--- a/generated/Tier 1 Broker Scorecards/Tamarez Group Inc_Broker_Scorecard.pptx
+++ b/generated/Tier 1 Broker Scorecards/Tamarez Group Inc_Broker_Scorecard.pptx
@@ -4428,7 +4428,7 @@
                           </a:solidFill>
                           <a:latin typeface="Segoe UI"/>
                         </a:rPr>
-                        <a:t>49</a:t>
+                        <a:t>50</a:t>
                       </a:r>
                     </a:p>
                   </a:txBody>
@@ -4707,7 +4707,7 @@
                           </a:solidFill>
                           <a:latin typeface="Segoe UI"/>
                         </a:rPr>
-                        <a:t>6.1%</a:t>
+                        <a:t>6.0%</a:t>
                       </a:r>
                     </a:p>
                   </a:txBody>

--- a/generated/Tier 1 Broker Scorecards/Tamarez Group Inc_Broker_Scorecard.pptx
+++ b/generated/Tier 1 Broker Scorecards/Tamarez Group Inc_Broker_Scorecard.pptx
@@ -3394,7 +3394,7 @@
                         <a:rPr sz="900">
                           <a:latin typeface="Segoe UI"/>
                         </a:rPr>
-                        <a:t>Tier 1  |  5.26% / 15.00%</a:t>
+                        <a:t>Tier 1  |  4.66% / 15.00%</a:t>
                       </a:r>
                     </a:p>
                   </a:txBody>
@@ -3766,7 +3766,7 @@
                         <a:rPr sz="900">
                           <a:latin typeface="Segoe UI"/>
                         </a:rPr>
-                        <a:t>Non-Fleet Subs: 189  |  Binds: 10</a:t>
+                        <a:t>Non-Fleet Subs: 192  |  Binds: 9</a:t>
                       </a:r>
                     </a:p>
                   </a:txBody>
@@ -4428,7 +4428,7 @@
                           </a:solidFill>
                           <a:latin typeface="Segoe UI"/>
                         </a:rPr>
-                        <a:t>50</a:t>
+                        <a:t>53</a:t>
                       </a:r>
                     </a:p>
                   </a:txBody>
@@ -4707,7 +4707,7 @@
                           </a:solidFill>
                           <a:latin typeface="Segoe UI"/>
                         </a:rPr>
-                        <a:t>6.0%</a:t>
+                        <a:t>3.8%</a:t>
                       </a:r>
                     </a:p>
                   </a:txBody>
@@ -4983,7 +4983,7 @@
                           </a:solidFill>
                           <a:latin typeface="Segoe UI"/>
                         </a:rPr>
-                        <a:t>3</a:t>
+                        <a:t>2</a:t>
                       </a:r>
                     </a:p>
                   </a:txBody>

--- a/generated/Tier 1 Broker Scorecards/Tamarez Group Inc_Broker_Scorecard.pptx
+++ b/generated/Tier 1 Broker Scorecards/Tamarez Group Inc_Broker_Scorecard.pptx
@@ -3357,7 +3357,7 @@
                         <a:rPr sz="800">
                           <a:latin typeface="Segoe UI"/>
                         </a:rPr>
-                        <a:t>$861,891.23 / $946,627.22 / $165,989.32</a:t>
+                        <a:t>$861,891.23 / $959,240.94 / $165,989.32</a:t>
                       </a:r>
                     </a:p>
                   </a:txBody>
